--- a/W1.pptx
+++ b/W1.pptx
@@ -234,7 +234,7 @@
           <a:p>
             <a:fld id="{F9B1E33A-5EB8-4337-A867-7AD28AB69963}" type="datetimeFigureOut">
               <a:rPr lang="en-US" smtClean="0"/>
-              <a:t>4/13/2026</a:t>
+              <a:t>4/15/2026</a:t>
             </a:fld>
             <a:endParaRPr lang="en-US"/>
           </a:p>
@@ -685,7 +685,7 @@
             <a:fld id="{5BCAD085-E8A6-8845-BD4E-CB4CCA059FC4}" type="datetimeFigureOut">
               <a:rPr lang="en-US" smtClean="0"/>
               <a:pPr/>
-              <a:t>4/13/2026</a:t>
+              <a:t>4/15/2026</a:t>
             </a:fld>
             <a:endParaRPr lang="en-US"/>
           </a:p>
@@ -962,7 +962,7 @@
             <a:fld id="{5BCAD085-E8A6-8845-BD4E-CB4CCA059FC4}" type="datetimeFigureOut">
               <a:rPr lang="en-US" smtClean="0"/>
               <a:pPr/>
-              <a:t>4/13/2026</a:t>
+              <a:t>4/15/2026</a:t>
             </a:fld>
             <a:endParaRPr lang="en-US"/>
           </a:p>
@@ -1158,7 +1158,7 @@
             <a:fld id="{5BCAD085-E8A6-8845-BD4E-CB4CCA059FC4}" type="datetimeFigureOut">
               <a:rPr lang="en-US" smtClean="0"/>
               <a:pPr/>
-              <a:t>4/13/2026</a:t>
+              <a:t>4/15/2026</a:t>
             </a:fld>
             <a:endParaRPr lang="en-US"/>
           </a:p>
@@ -1433,7 +1433,7 @@
             <a:fld id="{5BCAD085-E8A6-8845-BD4E-CB4CCA059FC4}" type="datetimeFigureOut">
               <a:rPr lang="en-US" smtClean="0"/>
               <a:pPr/>
-              <a:t>4/13/2026</a:t>
+              <a:t>4/15/2026</a:t>
             </a:fld>
             <a:endParaRPr lang="en-US"/>
           </a:p>
@@ -1776,7 +1776,7 @@
             <a:fld id="{5BCAD085-E8A6-8845-BD4E-CB4CCA059FC4}" type="datetimeFigureOut">
               <a:rPr lang="en-US" smtClean="0"/>
               <a:pPr/>
-              <a:t>4/13/2026</a:t>
+              <a:t>4/15/2026</a:t>
             </a:fld>
             <a:endParaRPr lang="en-US"/>
           </a:p>
@@ -2401,7 +2401,7 @@
             <a:fld id="{5BCAD085-E8A6-8845-BD4E-CB4CCA059FC4}" type="datetimeFigureOut">
               <a:rPr lang="en-US" smtClean="0"/>
               <a:pPr/>
-              <a:t>4/13/2026</a:t>
+              <a:t>4/15/2026</a:t>
             </a:fld>
             <a:endParaRPr lang="en-US"/>
           </a:p>
@@ -3263,7 +3263,7 @@
             <a:fld id="{5BCAD085-E8A6-8845-BD4E-CB4CCA059FC4}" type="datetimeFigureOut">
               <a:rPr lang="en-US" smtClean="0"/>
               <a:pPr/>
-              <a:t>4/13/2026</a:t>
+              <a:t>4/15/2026</a:t>
             </a:fld>
             <a:endParaRPr lang="en-US"/>
           </a:p>
@@ -3435,7 +3435,7 @@
             <a:fld id="{5BCAD085-E8A6-8845-BD4E-CB4CCA059FC4}" type="datetimeFigureOut">
               <a:rPr lang="en-US" smtClean="0"/>
               <a:pPr/>
-              <a:t>4/13/2026</a:t>
+              <a:t>4/15/2026</a:t>
             </a:fld>
             <a:endParaRPr lang="en-US"/>
           </a:p>
@@ -3617,7 +3617,7 @@
             <a:fld id="{5BCAD085-E8A6-8845-BD4E-CB4CCA059FC4}" type="datetimeFigureOut">
               <a:rPr lang="en-US" smtClean="0"/>
               <a:pPr/>
-              <a:t>4/13/2026</a:t>
+              <a:t>4/15/2026</a:t>
             </a:fld>
             <a:endParaRPr lang="en-US"/>
           </a:p>
@@ -3789,7 +3789,7 @@
             <a:fld id="{5BCAD085-E8A6-8845-BD4E-CB4CCA059FC4}" type="datetimeFigureOut">
               <a:rPr lang="en-US" smtClean="0"/>
               <a:pPr/>
-              <a:t>4/13/2026</a:t>
+              <a:t>4/15/2026</a:t>
             </a:fld>
             <a:endParaRPr lang="en-US"/>
           </a:p>
@@ -4038,7 +4038,7 @@
             <a:fld id="{5BCAD085-E8A6-8845-BD4E-CB4CCA059FC4}" type="datetimeFigureOut">
               <a:rPr lang="en-US" smtClean="0"/>
               <a:pPr/>
-              <a:t>4/13/2026</a:t>
+              <a:t>4/15/2026</a:t>
             </a:fld>
             <a:endParaRPr lang="en-US"/>
           </a:p>
@@ -4332,7 +4332,7 @@
             <a:fld id="{5BCAD085-E8A6-8845-BD4E-CB4CCA059FC4}" type="datetimeFigureOut">
               <a:rPr lang="en-US" smtClean="0"/>
               <a:pPr/>
-              <a:t>4/13/2026</a:t>
+              <a:t>4/15/2026</a:t>
             </a:fld>
             <a:endParaRPr lang="en-US"/>
           </a:p>
@@ -4778,7 +4778,7 @@
             <a:fld id="{5BCAD085-E8A6-8845-BD4E-CB4CCA059FC4}" type="datetimeFigureOut">
               <a:rPr lang="en-US" smtClean="0"/>
               <a:pPr/>
-              <a:t>4/13/2026</a:t>
+              <a:t>4/15/2026</a:t>
             </a:fld>
             <a:endParaRPr lang="en-US"/>
           </a:p>
@@ -4898,7 +4898,7 @@
             <a:fld id="{5BCAD085-E8A6-8845-BD4E-CB4CCA059FC4}" type="datetimeFigureOut">
               <a:rPr lang="en-US" smtClean="0"/>
               <a:pPr/>
-              <a:t>4/13/2026</a:t>
+              <a:t>4/15/2026</a:t>
             </a:fld>
             <a:endParaRPr lang="en-US"/>
           </a:p>
@@ -4995,7 +4995,7 @@
             <a:fld id="{5BCAD085-E8A6-8845-BD4E-CB4CCA059FC4}" type="datetimeFigureOut">
               <a:rPr lang="en-US" smtClean="0"/>
               <a:pPr/>
-              <a:t>4/13/2026</a:t>
+              <a:t>4/15/2026</a:t>
             </a:fld>
             <a:endParaRPr lang="en-US"/>
           </a:p>
@@ -5276,7 +5276,7 @@
             <a:fld id="{5BCAD085-E8A6-8845-BD4E-CB4CCA059FC4}" type="datetimeFigureOut">
               <a:rPr lang="en-US" smtClean="0"/>
               <a:pPr/>
-              <a:t>4/13/2026</a:t>
+              <a:t>4/15/2026</a:t>
             </a:fld>
             <a:endParaRPr lang="en-US"/>
           </a:p>
@@ -5553,7 +5553,7 @@
             <a:fld id="{5BCAD085-E8A6-8845-BD4E-CB4CCA059FC4}" type="datetimeFigureOut">
               <a:rPr lang="en-US" smtClean="0"/>
               <a:pPr/>
-              <a:t>4/13/2026</a:t>
+              <a:t>4/15/2026</a:t>
             </a:fld>
             <a:endParaRPr lang="en-US"/>
           </a:p>
@@ -6162,7 +6162,7 @@
             <a:fld id="{5BCAD085-E8A6-8845-BD4E-CB4CCA059FC4}" type="datetimeFigureOut">
               <a:rPr lang="en-US" smtClean="0"/>
               <a:pPr/>
-              <a:t>4/13/2026</a:t>
+              <a:t>4/15/2026</a:t>
             </a:fld>
             <a:endParaRPr lang="en-US"/>
           </a:p>
@@ -6720,10 +6720,10 @@
           <a:lstStyle/>
           <a:p>
             <a:r>
-              <a:rPr lang="en-US" sz="4400" dirty="0"/>
+              <a:rPr lang="en-US" sz="4400" u="sng" dirty="0"/>
               <a:t>Memory management optimization strategies</a:t>
             </a:r>
-            <a:endParaRPr lang="en-IN" sz="4200" dirty="0"/>
+            <a:endParaRPr lang="en-IN" sz="4200" u="sng" dirty="0"/>
           </a:p>
         </p:txBody>
       </p:sp>
@@ -6833,8 +6833,8 @@
         </p:nvSpPr>
         <p:spPr>
           <a:xfrm>
-            <a:off x="2622430" y="4226943"/>
-            <a:ext cx="3295292" cy="830997"/>
+            <a:off x="2673927" y="4959927"/>
+            <a:ext cx="3408219" cy="830997"/>
           </a:xfrm>
           <a:prstGeom prst="rect">
             <a:avLst/>
@@ -6848,16 +6848,55 @@
           <a:lstStyle/>
           <a:p>
             <a:r>
-              <a:rPr lang="en-GB" sz="2400" dirty="0"/>
-              <a:t>NAME : VAIBAV V</a:t>
-            </a:r>
-          </a:p>
-          <a:p>
-            <a:r>
-              <a:rPr lang="en-GB" sz="2400" dirty="0"/>
-              <a:t>COURSE : BCA </a:t>
+              <a:rPr lang="en-GB" sz="2400" dirty="0" smtClean="0"/>
+              <a:t>V.VAIBAV </a:t>
+            </a:r>
+            <a:endParaRPr lang="en-GB" sz="2400" dirty="0"/>
+          </a:p>
+          <a:p>
+            <a:r>
+              <a:rPr lang="en-IN" sz="2400" dirty="0" smtClean="0"/>
+              <a:t>R.KOTTEESWARAN</a:t>
             </a:r>
             <a:endParaRPr lang="en-IN" sz="2400" dirty="0"/>
+          </a:p>
+        </p:txBody>
+      </p:sp>
+      <p:sp>
+        <p:nvSpPr>
+          <p:cNvPr id="4" name="TextBox 3"/>
+          <p:cNvSpPr txBox="1"/>
+          <p:nvPr/>
+        </p:nvSpPr>
+        <p:spPr>
+          <a:xfrm>
+            <a:off x="1745673" y="4197926"/>
+            <a:ext cx="5320145" cy="523220"/>
+          </a:xfrm>
+          <a:prstGeom prst="rect">
+            <a:avLst/>
+          </a:prstGeom>
+          <a:noFill/>
+        </p:spPr>
+        <p:txBody>
+          <a:bodyPr wrap="square" rtlCol="0">
+            <a:spAutoFit/>
+          </a:bodyPr>
+          <a:lstStyle/>
+          <a:p>
+            <a:r>
+              <a:rPr lang="en-US" sz="2800" dirty="0" smtClean="0"/>
+              <a:t>COLLABORATIVE</a:t>
+            </a:r>
+            <a:r>
+              <a:rPr lang="en-US" sz="2000" dirty="0" smtClean="0"/>
+              <a:t> </a:t>
+            </a:r>
+            <a:r>
+              <a:rPr lang="en-US" sz="2800" dirty="0" smtClean="0"/>
+              <a:t>WORK BY:</a:t>
+            </a:r>
+            <a:endParaRPr lang="en-US" sz="2800" dirty="0"/>
           </a:p>
         </p:txBody>
       </p:sp>
@@ -7009,8 +7048,8 @@
         </p:nvSpPr>
         <p:spPr>
           <a:xfrm>
-            <a:off x="249382" y="86264"/>
-            <a:ext cx="2978727" cy="1285336"/>
+            <a:off x="0" y="27708"/>
+            <a:ext cx="5043054" cy="720435"/>
           </a:xfrm>
         </p:spPr>
         <p:txBody>
@@ -7025,15 +7064,65 @@
           </a:p>
         </p:txBody>
       </p:sp>
+      <p:sp>
+        <p:nvSpPr>
+          <p:cNvPr id="4" name="Text Placeholder 3"/>
+          <p:cNvSpPr>
+            <a:spLocks noGrp="1"/>
+          </p:cNvSpPr>
+          <p:nvPr>
+            <p:ph type="body" sz="half" idx="2"/>
+          </p:nvPr>
+        </p:nvSpPr>
+        <p:spPr>
+          <a:xfrm>
+            <a:off x="360218" y="748144"/>
+            <a:ext cx="7564582" cy="817420"/>
+          </a:xfrm>
+        </p:spPr>
+        <p:txBody>
+          <a:bodyPr>
+            <a:normAutofit/>
+          </a:bodyPr>
+          <a:lstStyle/>
+          <a:p>
+            <a:r>
+              <a:rPr lang="en-US" sz="2000" dirty="0"/>
+              <a:t>A </a:t>
+            </a:r>
+            <a:r>
+              <a:rPr lang="en-US" sz="2000" b="1" dirty="0"/>
+              <a:t>garbage value</a:t>
+            </a:r>
+            <a:r>
+              <a:rPr lang="en-US" sz="2000" dirty="0"/>
+              <a:t> is a </a:t>
+            </a:r>
+            <a:r>
+              <a:rPr lang="en-US" sz="2000" b="1" dirty="0"/>
+              <a:t>random or unknown value</a:t>
+            </a:r>
+            <a:r>
+              <a:rPr lang="en-US" sz="2000" dirty="0"/>
+              <a:t> stored in a variable when it is </a:t>
+            </a:r>
+            <a:r>
+              <a:rPr lang="en-US" sz="2000" b="1" dirty="0"/>
+              <a:t>not initialized</a:t>
+            </a:r>
+            <a:r>
+              <a:rPr lang="en-US" sz="2400" dirty="0"/>
+              <a:t>.</a:t>
+            </a:r>
+          </a:p>
+          <a:p>
+            <a:endParaRPr lang="en-US" sz="1600" dirty="0"/>
+          </a:p>
+        </p:txBody>
+      </p:sp>
       <p:pic>
         <p:nvPicPr>
-          <p:cNvPr id="6" name="Content Placeholder 5">
-            <a:extLst>
-              <a:ext uri="{FF2B5EF4-FFF2-40B4-BE49-F238E27FC236}">
-                <a16:creationId xmlns:a16="http://schemas.microsoft.com/office/drawing/2014/main" id="{1EC7B427-F509-C2D3-8F12-E7FA00C701C9}"/>
-              </a:ext>
-            </a:extLst>
-          </p:cNvPr>
+          <p:cNvPr id="5" name="Content Placeholder 4"/>
           <p:cNvPicPr>
             <a:picLocks noGrp="1" noChangeAspect="1"/>
           </p:cNvPicPr>
@@ -7042,77 +7131,24 @@
           </p:nvPr>
         </p:nvPicPr>
         <p:blipFill>
-          <a:blip r:embed="rId2"/>
+          <a:blip r:embed="rId2">
+            <a:extLst>
+              <a:ext uri="{28A0092B-C50C-407E-A947-70E740481C1C}">
+                <a14:useLocalDpi xmlns:a14="http://schemas.microsoft.com/office/drawing/2010/main" val="0"/>
+              </a:ext>
+            </a:extLst>
+          </a:blip>
           <a:stretch>
             <a:fillRect/>
           </a:stretch>
         </p:blipFill>
         <p:spPr>
           <a:xfrm>
-            <a:off x="2708696" y="1207698"/>
-            <a:ext cx="6413722" cy="5564038"/>
-          </a:xfrm>
-          <a:prstGeom prst="rect">
-            <a:avLst/>
-          </a:prstGeom>
+            <a:off x="263237" y="1565565"/>
+            <a:ext cx="8381999" cy="4917802"/>
+          </a:xfrm>
         </p:spPr>
       </p:pic>
-      <p:sp>
-        <p:nvSpPr>
-          <p:cNvPr id="4" name="Text Placeholder 3"/>
-          <p:cNvSpPr>
-            <a:spLocks noGrp="1"/>
-          </p:cNvSpPr>
-          <p:nvPr>
-            <p:ph type="body" sz="half" idx="2"/>
-          </p:nvPr>
-        </p:nvSpPr>
-        <p:spPr>
-          <a:xfrm>
-            <a:off x="249383" y="1587260"/>
-            <a:ext cx="2459312" cy="2208364"/>
-          </a:xfrm>
-        </p:spPr>
-        <p:txBody>
-          <a:bodyPr>
-            <a:normAutofit fontScale="92500" lnSpcReduction="10000"/>
-          </a:bodyPr>
-          <a:lstStyle/>
-          <a:p>
-            <a:r>
-              <a:rPr lang="en-US" sz="2400" dirty="0"/>
-              <a:t>A </a:t>
-            </a:r>
-            <a:r>
-              <a:rPr lang="en-US" sz="2400" b="1" dirty="0"/>
-              <a:t>garbage value</a:t>
-            </a:r>
-            <a:r>
-              <a:rPr lang="en-US" sz="2400" dirty="0"/>
-              <a:t> is a </a:t>
-            </a:r>
-            <a:r>
-              <a:rPr lang="en-US" sz="2400" b="1" dirty="0"/>
-              <a:t>random or unknown value</a:t>
-            </a:r>
-            <a:r>
-              <a:rPr lang="en-US" sz="2400" dirty="0"/>
-              <a:t> stored in a variable when it is </a:t>
-            </a:r>
-            <a:r>
-              <a:rPr lang="en-US" sz="2400" b="1" dirty="0"/>
-              <a:t>not initialized</a:t>
-            </a:r>
-            <a:r>
-              <a:rPr lang="en-US" sz="2400" dirty="0"/>
-              <a:t>.</a:t>
-            </a:r>
-          </a:p>
-          <a:p>
-            <a:endParaRPr lang="en-US" sz="1600" dirty="0"/>
-          </a:p>
-        </p:txBody>
-      </p:sp>
     </p:spTree>
     <p:extLst>
       <p:ext uri="{BB962C8B-B14F-4D97-AF65-F5344CB8AC3E}">
@@ -7715,6 +7751,10 @@
               <a:rPr lang="en-US" dirty="0"/>
               <a:t>What is Memory Optimization </a:t>
             </a:r>
+            <a:r>
+              <a:rPr lang="en-US" b="1" dirty="0"/>
+              <a:t/>
+            </a:r>
             <a:br>
               <a:rPr lang="en-US" b="1" dirty="0"/>
             </a:br>
@@ -8323,7 +8363,7 @@
         </p:spPr>
         <p:txBody>
           <a:bodyPr>
-            <a:normAutofit fontScale="92500" lnSpcReduction="20000"/>
+            <a:normAutofit fontScale="85000" lnSpcReduction="10000"/>
           </a:bodyPr>
           <a:lstStyle/>
           <a:p>
@@ -9059,15 +9099,7 @@
           <a:p>
             <a:r>
               <a:rPr lang="en-US" dirty="0"/>
-              <a:t>Examples: </a:t>
-            </a:r>
-            <a:r>
-              <a:rPr lang="en-US" dirty="0" err="1"/>
-              <a:t>int</a:t>
-            </a:r>
-            <a:r>
-              <a:rPr lang="en-US" dirty="0"/>
-              <a:t>   a;  // declared but NOT initialized.</a:t>
+              <a:t>Examples: int   a;  // declared but NOT initialized.</a:t>
             </a:r>
           </a:p>
         </p:txBody>
@@ -9171,38 +9203,6 @@
           </a:p>
         </p:txBody>
       </p:sp>
-      <p:pic>
-        <p:nvPicPr>
-          <p:cNvPr id="13" name="Content Placeholder 12">
-            <a:extLst>
-              <a:ext uri="{FF2B5EF4-FFF2-40B4-BE49-F238E27FC236}">
-                <a16:creationId xmlns:a16="http://schemas.microsoft.com/office/drawing/2014/main" id="{ABA1158E-EE08-2991-28EA-B349E8BBDC70}"/>
-              </a:ext>
-            </a:extLst>
-          </p:cNvPr>
-          <p:cNvPicPr>
-            <a:picLocks noGrp="1" noChangeAspect="1"/>
-          </p:cNvPicPr>
-          <p:nvPr>
-            <p:ph idx="1"/>
-          </p:nvPr>
-        </p:nvPicPr>
-        <p:blipFill>
-          <a:blip r:embed="rId2"/>
-          <a:stretch>
-            <a:fillRect/>
-          </a:stretch>
-        </p:blipFill>
-        <p:spPr>
-          <a:xfrm>
-            <a:off x="205484" y="2049695"/>
-            <a:ext cx="8650840" cy="4654193"/>
-          </a:xfrm>
-          <a:prstGeom prst="rect">
-            <a:avLst/>
-          </a:prstGeom>
-        </p:spPr>
-      </p:pic>
       <p:sp>
         <p:nvSpPr>
           <p:cNvPr id="16" name="TextBox 15">
@@ -9306,6 +9306,35 @@
           </a:p>
         </p:txBody>
       </p:sp>
+      <p:pic>
+        <p:nvPicPr>
+          <p:cNvPr id="5" name="Content Placeholder 4"/>
+          <p:cNvPicPr>
+            <a:picLocks noGrp="1" noChangeAspect="1"/>
+          </p:cNvPicPr>
+          <p:nvPr>
+            <p:ph idx="1"/>
+          </p:nvPr>
+        </p:nvPicPr>
+        <p:blipFill>
+          <a:blip r:embed="rId2">
+            <a:extLst>
+              <a:ext uri="{28A0092B-C50C-407E-A947-70E740481C1C}">
+                <a14:useLocalDpi xmlns:a14="http://schemas.microsoft.com/office/drawing/2010/main" val="0"/>
+              </a:ext>
+            </a:extLst>
+          </a:blip>
+          <a:stretch>
+            <a:fillRect/>
+          </a:stretch>
+        </p:blipFill>
+        <p:spPr>
+          <a:xfrm>
+            <a:off x="750013" y="2720954"/>
+            <a:ext cx="6996515" cy="3157561"/>
+          </a:xfrm>
+        </p:spPr>
+      </p:pic>
     </p:spTree>
     <p:extLst>
       <p:ext uri="{BB962C8B-B14F-4D97-AF65-F5344CB8AC3E}">
